--- a/public/fun/pack/pptx/weddingpro/결혼식프리미엄_11_소개중심_플럼샴페인.pptx
+++ b/public/fun/pack/pptx/weddingpro/결혼식프리미엄_11_소개중심_플럼샴페인.pptx
@@ -113,12 +113,12 @@
   <p:extLst>
     <p:ext uri="{521415D9-36F7-43E2-AB2F-B90AF26B5E84}">
       <p14:sectionLst xmlns:p14="http://schemas.microsoft.com/office/powerpoint/2010/main">
-        <p14:section name="시작" id="{C573872B-1C56-47AB-BEC3-18D36F00D3A8}">
+        <p14:section name="시작" id="{E969BDD2-6580-4EF2-8ABA-CB7A5961641D}">
           <p14:sldIdLst>
             <p14:sldId id="256"/>
           </p14:sldIdLst>
         </p14:section>
-        <p14:section name="본문" id="{5AE75580-ACAD-439C-98C9-C12CCA94D183}">
+        <p14:section name="본문" id="{C2A344D5-BC6A-4968-89CF-647942E4D7CB}">
           <p14:sldIdLst>
             <p14:sldId id="257"/>
             <p14:sldId id="258"/>
@@ -127,7 +127,7 @@
             <p14:sldId id="261"/>
           </p14:sldIdLst>
         </p14:section>
-        <p14:section name="마무리" id="{C69D9DBD-96E9-4348-89FE-1F755F24A5FC}">
+        <p14:section name="마무리" id="{380879FB-1A4A-4F57-88C7-5BF4577A084A}">
           <p14:sldIdLst>
             <p14:sldId id="262"/>
           </p14:sldIdLst>
@@ -1472,7 +1472,7 @@
             </a:lvl1pPr>
           </a:lstStyle>
           <a:p>
-            <a:fld id="{FEB8FE46-44A2-4B31-A693-2F613AEF4AE6}" type="slidenum">
+            <a:fld id="{5925A6A2-7D4A-48A5-B0B9-7D284D78929E}" type="slidenum">
               <a:rPr lang="en-US"/>
               <a:t>‹#›</a:t>
             </a:fld>
@@ -2165,7 +2165,7 @@
             </a:lvl1pPr>
           </a:lstStyle>
           <a:p>
-            <a:fld id="{D3AF6CA2-2E61-4D93-94B1-3027A833019F}" type="slidenum">
+            <a:fld id="{0E0DEA12-6674-4729-B4A0-E537F1D9C2E9}" type="slidenum">
               <a:rPr lang="en-US"/>
               <a:t>‹#›</a:t>
             </a:fld>
@@ -2906,7 +2906,7 @@
             </a:lvl1pPr>
           </a:lstStyle>
           <a:p>
-            <a:fld id="{B5063EF2-68B9-4D8A-A276-20A98E1A50B7}" type="slidenum">
+            <a:fld id="{0FAAF25A-F959-4115-8A9F-5721B309FF60}" type="slidenum">
               <a:rPr lang="en-US"/>
               <a:t>‹#›</a:t>
             </a:fld>
@@ -3797,7 +3797,7 @@
           <a:p>
             <a:r>
               <a:rPr lang="ko-KR"/>
-              <a:t>0000. 00. 00 · 예식장 이름</a:t>
+              <a:t>날짜 입력 · 예식장 이름</a:t>
             </a:r>
           </a:p>
         </p:txBody>
@@ -4052,7 +4052,7 @@
           <a:bodyPr/>
           <a:lstStyle/>
           <a:p>
-            <a:fld id="{499C8D2D-FCD4-4086-9A33-5C5D2D384123}" type="slidenum">
+            <a:fld id="{7BE1B7BC-C053-45C1-9D9C-A1F851574168}" type="slidenum">
               <a:rPr lang="en-US"/>
               <a:t>‹#›</a:t>
             </a:fld>
@@ -4524,7 +4524,7 @@
           <a:bodyPr/>
           <a:lstStyle/>
           <a:p>
-            <a:fld id="{044476A8-FD79-410B-BF56-BAAAC86C8605}" type="slidenum">
+            <a:fld id="{951D03E5-A431-4078-8915-70D809FDDC5E}" type="slidenum">
               <a:rPr lang="en-US"/>
               <a:t>‹#›</a:t>
             </a:fld>
@@ -5198,7 +5198,7 @@
           <a:bodyPr/>
           <a:lstStyle/>
           <a:p>
-            <a:fld id="{78F03AB8-313F-4041-BD36-BEB6D9CC299D}" type="slidenum">
+            <a:fld id="{1A9399DD-670C-4270-B1AC-F5A0E78F42AC}" type="slidenum">
               <a:rPr lang="en-US"/>
               <a:t>‹#›</a:t>
             </a:fld>
@@ -6170,7 +6170,7 @@
           <a:bodyPr/>
           <a:lstStyle/>
           <a:p>
-            <a:fld id="{3B917FB6-1A53-407A-8F84-DD2B6F852EB1}" type="slidenum">
+            <a:fld id="{AE172AC7-FA21-4F99-940D-27066E8AF53C}" type="slidenum">
               <a:rPr lang="en-US"/>
               <a:t>‹#›</a:t>
             </a:fld>
@@ -6280,7 +6280,7 @@
           <a:bodyPr/>
           <a:lstStyle/>
           <a:p>
-            <a:fld id="{1F7F7B5B-F9EB-462F-A7B0-A36F0F27E1F8}" type="slidenum">
+            <a:fld id="{2DCAF3AA-BDB2-4205-8ECD-B003E12104B9}" type="slidenum">
               <a:rPr lang="en-US"/>
               <a:t>‹#›</a:t>
             </a:fld>
